--- a/ゲーム科1年/00_前期/ゲームプログラミングⅡ/01_シーン管理.pptx
+++ b/ゲーム科1年/00_前期/ゲームプログラミングⅡ/01_シーン管理.pptx
@@ -280,7 +280,7 @@
           <a:p>
             <a:fld id="{E9CC885B-4903-4D54-9A93-00025F12DED9}" type="datetimeFigureOut">
               <a:rPr kumimoji="1" lang="ja-JP" altLang="en-US" smtClean="0"/>
-              <a:t>2024/9/13</a:t>
+              <a:t>2025/1/6</a:t>
             </a:fld>
             <a:endParaRPr kumimoji="1" lang="ja-JP" altLang="en-US"/>
           </a:p>
@@ -510,7 +510,7 @@
           <a:p>
             <a:fld id="{E9CC885B-4903-4D54-9A93-00025F12DED9}" type="datetimeFigureOut">
               <a:rPr kumimoji="1" lang="ja-JP" altLang="en-US" smtClean="0"/>
-              <a:t>2024/9/13</a:t>
+              <a:t>2025/1/6</a:t>
             </a:fld>
             <a:endParaRPr kumimoji="1" lang="ja-JP" altLang="en-US"/>
           </a:p>
@@ -750,7 +750,7 @@
           <a:p>
             <a:fld id="{E9CC885B-4903-4D54-9A93-00025F12DED9}" type="datetimeFigureOut">
               <a:rPr kumimoji="1" lang="ja-JP" altLang="en-US" smtClean="0"/>
-              <a:t>2024/9/13</a:t>
+              <a:t>2025/1/6</a:t>
             </a:fld>
             <a:endParaRPr kumimoji="1" lang="ja-JP" altLang="en-US"/>
           </a:p>
@@ -980,7 +980,7 @@
           <a:p>
             <a:fld id="{E9CC885B-4903-4D54-9A93-00025F12DED9}" type="datetimeFigureOut">
               <a:rPr kumimoji="1" lang="ja-JP" altLang="en-US" smtClean="0"/>
-              <a:t>2024/9/13</a:t>
+              <a:t>2025/1/6</a:t>
             </a:fld>
             <a:endParaRPr kumimoji="1" lang="ja-JP" altLang="en-US"/>
           </a:p>
@@ -1255,7 +1255,7 @@
           <a:p>
             <a:fld id="{E9CC885B-4903-4D54-9A93-00025F12DED9}" type="datetimeFigureOut">
               <a:rPr kumimoji="1" lang="ja-JP" altLang="en-US" smtClean="0"/>
-              <a:t>2024/9/13</a:t>
+              <a:t>2025/1/6</a:t>
             </a:fld>
             <a:endParaRPr kumimoji="1" lang="ja-JP" altLang="en-US"/>
           </a:p>
@@ -1584,7 +1584,7 @@
           <a:p>
             <a:fld id="{E9CC885B-4903-4D54-9A93-00025F12DED9}" type="datetimeFigureOut">
               <a:rPr kumimoji="1" lang="ja-JP" altLang="en-US" smtClean="0"/>
-              <a:t>2024/9/13</a:t>
+              <a:t>2025/1/6</a:t>
             </a:fld>
             <a:endParaRPr kumimoji="1" lang="ja-JP" altLang="en-US"/>
           </a:p>
@@ -2060,7 +2060,7 @@
           <a:p>
             <a:fld id="{E9CC885B-4903-4D54-9A93-00025F12DED9}" type="datetimeFigureOut">
               <a:rPr kumimoji="1" lang="ja-JP" altLang="en-US" smtClean="0"/>
-              <a:t>2024/9/13</a:t>
+              <a:t>2025/1/6</a:t>
             </a:fld>
             <a:endParaRPr kumimoji="1" lang="ja-JP" altLang="en-US"/>
           </a:p>
@@ -2201,7 +2201,7 @@
           <a:p>
             <a:fld id="{E9CC885B-4903-4D54-9A93-00025F12DED9}" type="datetimeFigureOut">
               <a:rPr kumimoji="1" lang="ja-JP" altLang="en-US" smtClean="0"/>
-              <a:t>2024/9/13</a:t>
+              <a:t>2025/1/6</a:t>
             </a:fld>
             <a:endParaRPr kumimoji="1" lang="ja-JP" altLang="en-US"/>
           </a:p>
@@ -2314,7 +2314,7 @@
           <a:p>
             <a:fld id="{E9CC885B-4903-4D54-9A93-00025F12DED9}" type="datetimeFigureOut">
               <a:rPr kumimoji="1" lang="ja-JP" altLang="en-US" smtClean="0"/>
-              <a:t>2024/9/13</a:t>
+              <a:t>2025/1/6</a:t>
             </a:fld>
             <a:endParaRPr kumimoji="1" lang="ja-JP" altLang="en-US"/>
           </a:p>
@@ -2657,7 +2657,7 @@
           <a:p>
             <a:fld id="{E9CC885B-4903-4D54-9A93-00025F12DED9}" type="datetimeFigureOut">
               <a:rPr kumimoji="1" lang="ja-JP" altLang="en-US" smtClean="0"/>
-              <a:t>2024/9/13</a:t>
+              <a:t>2025/1/6</a:t>
             </a:fld>
             <a:endParaRPr kumimoji="1" lang="ja-JP" altLang="en-US"/>
           </a:p>
@@ -2945,7 +2945,7 @@
           <a:p>
             <a:fld id="{E9CC885B-4903-4D54-9A93-00025F12DED9}" type="datetimeFigureOut">
               <a:rPr kumimoji="1" lang="ja-JP" altLang="en-US" smtClean="0"/>
-              <a:t>2024/9/13</a:t>
+              <a:t>2025/1/6</a:t>
             </a:fld>
             <a:endParaRPr kumimoji="1" lang="ja-JP" altLang="en-US"/>
           </a:p>
@@ -3218,7 +3218,7 @@
           <a:p>
             <a:fld id="{E9CC885B-4903-4D54-9A93-00025F12DED9}" type="datetimeFigureOut">
               <a:rPr kumimoji="1" lang="ja-JP" altLang="en-US" smtClean="0"/>
-              <a:t>2024/9/13</a:t>
+              <a:t>2025/1/6</a:t>
             </a:fld>
             <a:endParaRPr kumimoji="1" lang="ja-JP" altLang="en-US"/>
           </a:p>
@@ -3961,7 +3961,7 @@
         <p:spPr>
           <a:xfrm>
             <a:off x="567542" y="1216429"/>
-            <a:ext cx="8727069" cy="461665"/>
+            <a:ext cx="8868133" cy="461665"/>
           </a:xfrm>
           <a:prstGeom prst="rect">
             <a:avLst/>
@@ -3975,7 +3975,11 @@
           <a:lstStyle/>
           <a:p>
             <a:r>
-              <a:rPr lang="en-US" altLang="ja-JP" sz="2400" dirty="0" err="1"/>
+              <a:rPr lang="en-US" altLang="ja-JP" sz="2400" b="1" dirty="0" err="1">
+                <a:solidFill>
+                  <a:srgbClr val="FF0000"/>
+                </a:solidFill>
+              </a:rPr>
               <a:t>SceneManager.h</a:t>
             </a:r>
             <a:r>
@@ -4259,7 +4263,7 @@
         <p:spPr>
           <a:xfrm>
             <a:off x="576507" y="1216429"/>
-            <a:ext cx="6909264" cy="830997"/>
+            <a:ext cx="7071167" cy="830997"/>
           </a:xfrm>
           <a:prstGeom prst="rect">
             <a:avLst/>
@@ -4273,7 +4277,11 @@
           <a:lstStyle/>
           <a:p>
             <a:r>
-              <a:rPr lang="en-US" altLang="ja-JP" sz="2400" dirty="0"/>
+              <a:rPr lang="en-US" altLang="ja-JP" sz="2400" b="1" dirty="0">
+                <a:solidFill>
+                  <a:srgbClr val="FF0000"/>
+                </a:solidFill>
+              </a:rPr>
               <a:t>SceneManager.cpp</a:t>
             </a:r>
             <a:r>
@@ -4425,12 +4433,24 @@
           <a:lstStyle/>
           <a:p>
             <a:r>
-              <a:rPr lang="en-US" altLang="ja-JP" sz="2400" dirty="0" err="1"/>
+              <a:rPr lang="en-US" altLang="ja-JP" sz="2400" b="1" dirty="0" err="1">
+                <a:solidFill>
+                  <a:srgbClr val="0070C0"/>
+                </a:solidFill>
+              </a:rPr>
               <a:t>InitScene</a:t>
             </a:r>
             <a:r>
+              <a:rPr lang="ja-JP" altLang="en-US" sz="2400" b="1" dirty="0">
+                <a:solidFill>
+                  <a:srgbClr val="0070C0"/>
+                </a:solidFill>
+              </a:rPr>
+              <a:t>関数</a:t>
+            </a:r>
+            <a:r>
               <a:rPr lang="ja-JP" altLang="en-US" sz="2400" dirty="0"/>
-              <a:t>関数は、</a:t>
+              <a:t>は、</a:t>
             </a:r>
             <a:r>
               <a:rPr lang="ja-JP" altLang="en-US" sz="2400" b="1" dirty="0">
@@ -4513,7 +4533,11 @@
           <a:lstStyle/>
           <a:p>
             <a:r>
-              <a:rPr lang="en-US" altLang="ja-JP" sz="2400" dirty="0" err="1"/>
+              <a:rPr lang="en-US" altLang="ja-JP" sz="2400" b="1" dirty="0" err="1">
+                <a:solidFill>
+                  <a:srgbClr val="0070C0"/>
+                </a:solidFill>
+              </a:rPr>
               <a:t>LoadScene</a:t>
             </a:r>
             <a:r>
@@ -6597,7 +6621,7 @@
         <p:spPr>
           <a:xfrm>
             <a:off x="576507" y="4711700"/>
-            <a:ext cx="11061041" cy="461665"/>
+            <a:ext cx="11179664" cy="461665"/>
           </a:xfrm>
           <a:prstGeom prst="rect">
             <a:avLst/>
@@ -6615,11 +6639,15 @@
               <a:t>他のシーンではどのように</a:t>
             </a:r>
             <a:r>
-              <a:rPr lang="en-US" altLang="ja-JP" sz="2400" dirty="0" err="1"/>
+              <a:rPr lang="en-US" altLang="ja-JP" sz="2400" b="1" dirty="0" err="1">
+                <a:solidFill>
+                  <a:srgbClr val="0070C0"/>
+                </a:solidFill>
+              </a:rPr>
               <a:t>ChangeScene</a:t>
             </a:r>
             <a:r>
-              <a:rPr lang="ja-JP" altLang="en-US" sz="2400"/>
+              <a:rPr lang="ja-JP" altLang="en-US" sz="2400" dirty="0"/>
               <a:t>が呼ばれてるか確認してみましょう。</a:t>
             </a:r>
             <a:endParaRPr lang="en-US" altLang="ja-JP" sz="2400" b="1" dirty="0">
@@ -6911,12 +6939,24 @@
           </a:p>
           <a:p>
             <a:r>
-              <a:rPr lang="en-US" altLang="ja-JP" sz="2400" dirty="0"/>
+              <a:rPr lang="en-US" altLang="ja-JP" sz="2400" b="1" dirty="0">
+                <a:solidFill>
+                  <a:srgbClr val="00B050"/>
+                </a:solidFill>
+              </a:rPr>
               <a:t>Scene</a:t>
             </a:r>
             <a:r>
+              <a:rPr lang="ja-JP" altLang="en-US" sz="2400" b="1" dirty="0">
+                <a:solidFill>
+                  <a:srgbClr val="00B050"/>
+                </a:solidFill>
+              </a:rPr>
+              <a:t>フォルダ</a:t>
+            </a:r>
+            <a:r>
               <a:rPr lang="ja-JP" altLang="en-US" sz="2400" dirty="0"/>
-              <a:t>フォルダに追加しましょう。</a:t>
+              <a:t>に追加しましょう。</a:t>
             </a:r>
             <a:endParaRPr lang="en-US" altLang="ja-JP" sz="2400" dirty="0"/>
           </a:p>
@@ -7381,7 +7421,11 @@
           <a:lstStyle/>
           <a:p>
             <a:r>
-              <a:rPr lang="en-US" altLang="ja-JP" sz="2400" dirty="0"/>
+              <a:rPr lang="en-US" altLang="ja-JP" sz="2400" b="1" dirty="0">
+                <a:solidFill>
+                  <a:srgbClr val="FF0000"/>
+                </a:solidFill>
+              </a:rPr>
               <a:t>Title.cpp</a:t>
             </a:r>
             <a:r>

--- a/ゲーム科1年/00_前期/ゲームプログラミングⅡ/01_シーン管理.pptx
+++ b/ゲーム科1年/00_前期/ゲームプログラミングⅡ/01_シーン管理.pptx
@@ -280,7 +280,7 @@
           <a:p>
             <a:fld id="{E9CC885B-4903-4D54-9A93-00025F12DED9}" type="datetimeFigureOut">
               <a:rPr kumimoji="1" lang="ja-JP" altLang="en-US" smtClean="0"/>
-              <a:t>2025/1/6</a:t>
+              <a:t>2025/3/3</a:t>
             </a:fld>
             <a:endParaRPr kumimoji="1" lang="ja-JP" altLang="en-US"/>
           </a:p>
@@ -510,7 +510,7 @@
           <a:p>
             <a:fld id="{E9CC885B-4903-4D54-9A93-00025F12DED9}" type="datetimeFigureOut">
               <a:rPr kumimoji="1" lang="ja-JP" altLang="en-US" smtClean="0"/>
-              <a:t>2025/1/6</a:t>
+              <a:t>2025/3/3</a:t>
             </a:fld>
             <a:endParaRPr kumimoji="1" lang="ja-JP" altLang="en-US"/>
           </a:p>
@@ -750,7 +750,7 @@
           <a:p>
             <a:fld id="{E9CC885B-4903-4D54-9A93-00025F12DED9}" type="datetimeFigureOut">
               <a:rPr kumimoji="1" lang="ja-JP" altLang="en-US" smtClean="0"/>
-              <a:t>2025/1/6</a:t>
+              <a:t>2025/3/3</a:t>
             </a:fld>
             <a:endParaRPr kumimoji="1" lang="ja-JP" altLang="en-US"/>
           </a:p>
@@ -980,7 +980,7 @@
           <a:p>
             <a:fld id="{E9CC885B-4903-4D54-9A93-00025F12DED9}" type="datetimeFigureOut">
               <a:rPr kumimoji="1" lang="ja-JP" altLang="en-US" smtClean="0"/>
-              <a:t>2025/1/6</a:t>
+              <a:t>2025/3/3</a:t>
             </a:fld>
             <a:endParaRPr kumimoji="1" lang="ja-JP" altLang="en-US"/>
           </a:p>
@@ -1255,7 +1255,7 @@
           <a:p>
             <a:fld id="{E9CC885B-4903-4D54-9A93-00025F12DED9}" type="datetimeFigureOut">
               <a:rPr kumimoji="1" lang="ja-JP" altLang="en-US" smtClean="0"/>
-              <a:t>2025/1/6</a:t>
+              <a:t>2025/3/3</a:t>
             </a:fld>
             <a:endParaRPr kumimoji="1" lang="ja-JP" altLang="en-US"/>
           </a:p>
@@ -1584,7 +1584,7 @@
           <a:p>
             <a:fld id="{E9CC885B-4903-4D54-9A93-00025F12DED9}" type="datetimeFigureOut">
               <a:rPr kumimoji="1" lang="ja-JP" altLang="en-US" smtClean="0"/>
-              <a:t>2025/1/6</a:t>
+              <a:t>2025/3/3</a:t>
             </a:fld>
             <a:endParaRPr kumimoji="1" lang="ja-JP" altLang="en-US"/>
           </a:p>
@@ -2060,7 +2060,7 @@
           <a:p>
             <a:fld id="{E9CC885B-4903-4D54-9A93-00025F12DED9}" type="datetimeFigureOut">
               <a:rPr kumimoji="1" lang="ja-JP" altLang="en-US" smtClean="0"/>
-              <a:t>2025/1/6</a:t>
+              <a:t>2025/3/3</a:t>
             </a:fld>
             <a:endParaRPr kumimoji="1" lang="ja-JP" altLang="en-US"/>
           </a:p>
@@ -2201,7 +2201,7 @@
           <a:p>
             <a:fld id="{E9CC885B-4903-4D54-9A93-00025F12DED9}" type="datetimeFigureOut">
               <a:rPr kumimoji="1" lang="ja-JP" altLang="en-US" smtClean="0"/>
-              <a:t>2025/1/6</a:t>
+              <a:t>2025/3/3</a:t>
             </a:fld>
             <a:endParaRPr kumimoji="1" lang="ja-JP" altLang="en-US"/>
           </a:p>
@@ -2314,7 +2314,7 @@
           <a:p>
             <a:fld id="{E9CC885B-4903-4D54-9A93-00025F12DED9}" type="datetimeFigureOut">
               <a:rPr kumimoji="1" lang="ja-JP" altLang="en-US" smtClean="0"/>
-              <a:t>2025/1/6</a:t>
+              <a:t>2025/3/3</a:t>
             </a:fld>
             <a:endParaRPr kumimoji="1" lang="ja-JP" altLang="en-US"/>
           </a:p>
@@ -2657,7 +2657,7 @@
           <a:p>
             <a:fld id="{E9CC885B-4903-4D54-9A93-00025F12DED9}" type="datetimeFigureOut">
               <a:rPr kumimoji="1" lang="ja-JP" altLang="en-US" smtClean="0"/>
-              <a:t>2025/1/6</a:t>
+              <a:t>2025/3/3</a:t>
             </a:fld>
             <a:endParaRPr kumimoji="1" lang="ja-JP" altLang="en-US"/>
           </a:p>
@@ -2945,7 +2945,7 @@
           <a:p>
             <a:fld id="{E9CC885B-4903-4D54-9A93-00025F12DED9}" type="datetimeFigureOut">
               <a:rPr kumimoji="1" lang="ja-JP" altLang="en-US" smtClean="0"/>
-              <a:t>2025/1/6</a:t>
+              <a:t>2025/3/3</a:t>
             </a:fld>
             <a:endParaRPr kumimoji="1" lang="ja-JP" altLang="en-US"/>
           </a:p>
@@ -3218,7 +3218,7 @@
           <a:p>
             <a:fld id="{E9CC885B-4903-4D54-9A93-00025F12DED9}" type="datetimeFigureOut">
               <a:rPr kumimoji="1" lang="ja-JP" altLang="en-US" smtClean="0"/>
-              <a:t>2025/1/6</a:t>
+              <a:t>2025/3/3</a:t>
             </a:fld>
             <a:endParaRPr kumimoji="1" lang="ja-JP" altLang="en-US"/>
           </a:p>
@@ -5474,7 +5474,7 @@
         <p:spPr>
           <a:xfrm>
             <a:off x="576507" y="1216429"/>
-            <a:ext cx="7188186" cy="830997"/>
+            <a:ext cx="7329251" cy="830997"/>
           </a:xfrm>
           <a:prstGeom prst="rect">
             <a:avLst/>
@@ -5495,7 +5495,11 @@
           </a:p>
           <a:p>
             <a:r>
-              <a:rPr lang="en-US" altLang="ja-JP" sz="2400" dirty="0" err="1"/>
+              <a:rPr lang="en-US" altLang="ja-JP" sz="2400" b="1" dirty="0" err="1">
+                <a:solidFill>
+                  <a:srgbClr val="FF0000"/>
+                </a:solidFill>
+              </a:rPr>
               <a:t>SceneManager.h</a:t>
             </a:r>
             <a:r>
@@ -6366,7 +6370,7 @@
         <p:spPr>
           <a:xfrm>
             <a:off x="576507" y="1216429"/>
-            <a:ext cx="9214382" cy="830997"/>
+            <a:ext cx="9333004" cy="830997"/>
           </a:xfrm>
           <a:prstGeom prst="rect">
             <a:avLst/>
@@ -6380,12 +6384,24 @@
           <a:lstStyle/>
           <a:p>
             <a:r>
-              <a:rPr lang="en-US" altLang="ja-JP" sz="2400" dirty="0" err="1"/>
+              <a:rPr lang="en-US" altLang="ja-JP" sz="2400" b="1" dirty="0" err="1">
+                <a:solidFill>
+                  <a:srgbClr val="0070C0"/>
+                </a:solidFill>
+              </a:rPr>
               <a:t>ChangeScene</a:t>
             </a:r>
             <a:r>
+              <a:rPr lang="ja-JP" altLang="en-US" sz="2400" b="1" dirty="0">
+                <a:solidFill>
+                  <a:srgbClr val="0070C0"/>
+                </a:solidFill>
+              </a:rPr>
+              <a:t>関数</a:t>
+            </a:r>
+            <a:r>
               <a:rPr lang="ja-JP" altLang="en-US" sz="2400" dirty="0"/>
-              <a:t>関数には遷移先シーンを設定する処理を書きます。</a:t>
+              <a:t>には遷移先シーンを設定する処理を書きます。</a:t>
             </a:r>
             <a:endParaRPr lang="en-US" altLang="ja-JP" sz="2400" dirty="0"/>
           </a:p>
@@ -6532,7 +6548,11 @@
           <a:lstStyle/>
           <a:p>
             <a:r>
-              <a:rPr lang="en-US" altLang="ja-JP" sz="2400" dirty="0"/>
+              <a:rPr lang="en-US" altLang="ja-JP" sz="2400" b="1" dirty="0">
+                <a:solidFill>
+                  <a:srgbClr val="FF0000"/>
+                </a:solidFill>
+              </a:rPr>
               <a:t>TitleScene.cpp</a:t>
             </a:r>
             <a:r>

--- a/ゲーム科1年/00_前期/ゲームプログラミングⅡ/01_シーン管理.pptx
+++ b/ゲーム科1年/00_前期/ゲームプログラミングⅡ/01_シーン管理.pptx
@@ -280,7 +280,7 @@
           <a:p>
             <a:fld id="{E9CC885B-4903-4D54-9A93-00025F12DED9}" type="datetimeFigureOut">
               <a:rPr kumimoji="1" lang="ja-JP" altLang="en-US" smtClean="0"/>
-              <a:t>2025/3/3</a:t>
+              <a:t>2026/5/13</a:t>
             </a:fld>
             <a:endParaRPr kumimoji="1" lang="ja-JP" altLang="en-US"/>
           </a:p>
@@ -510,7 +510,7 @@
           <a:p>
             <a:fld id="{E9CC885B-4903-4D54-9A93-00025F12DED9}" type="datetimeFigureOut">
               <a:rPr kumimoji="1" lang="ja-JP" altLang="en-US" smtClean="0"/>
-              <a:t>2025/3/3</a:t>
+              <a:t>2026/5/13</a:t>
             </a:fld>
             <a:endParaRPr kumimoji="1" lang="ja-JP" altLang="en-US"/>
           </a:p>
@@ -750,7 +750,7 @@
           <a:p>
             <a:fld id="{E9CC885B-4903-4D54-9A93-00025F12DED9}" type="datetimeFigureOut">
               <a:rPr kumimoji="1" lang="ja-JP" altLang="en-US" smtClean="0"/>
-              <a:t>2025/3/3</a:t>
+              <a:t>2026/5/13</a:t>
             </a:fld>
             <a:endParaRPr kumimoji="1" lang="ja-JP" altLang="en-US"/>
           </a:p>
@@ -980,7 +980,7 @@
           <a:p>
             <a:fld id="{E9CC885B-4903-4D54-9A93-00025F12DED9}" type="datetimeFigureOut">
               <a:rPr kumimoji="1" lang="ja-JP" altLang="en-US" smtClean="0"/>
-              <a:t>2025/3/3</a:t>
+              <a:t>2026/5/13</a:t>
             </a:fld>
             <a:endParaRPr kumimoji="1" lang="ja-JP" altLang="en-US"/>
           </a:p>
@@ -1255,7 +1255,7 @@
           <a:p>
             <a:fld id="{E9CC885B-4903-4D54-9A93-00025F12DED9}" type="datetimeFigureOut">
               <a:rPr kumimoji="1" lang="ja-JP" altLang="en-US" smtClean="0"/>
-              <a:t>2025/3/3</a:t>
+              <a:t>2026/5/13</a:t>
             </a:fld>
             <a:endParaRPr kumimoji="1" lang="ja-JP" altLang="en-US"/>
           </a:p>
@@ -1584,7 +1584,7 @@
           <a:p>
             <a:fld id="{E9CC885B-4903-4D54-9A93-00025F12DED9}" type="datetimeFigureOut">
               <a:rPr kumimoji="1" lang="ja-JP" altLang="en-US" smtClean="0"/>
-              <a:t>2025/3/3</a:t>
+              <a:t>2026/5/13</a:t>
             </a:fld>
             <a:endParaRPr kumimoji="1" lang="ja-JP" altLang="en-US"/>
           </a:p>
@@ -2060,7 +2060,7 @@
           <a:p>
             <a:fld id="{E9CC885B-4903-4D54-9A93-00025F12DED9}" type="datetimeFigureOut">
               <a:rPr kumimoji="1" lang="ja-JP" altLang="en-US" smtClean="0"/>
-              <a:t>2025/3/3</a:t>
+              <a:t>2026/5/13</a:t>
             </a:fld>
             <a:endParaRPr kumimoji="1" lang="ja-JP" altLang="en-US"/>
           </a:p>
@@ -2201,7 +2201,7 @@
           <a:p>
             <a:fld id="{E9CC885B-4903-4D54-9A93-00025F12DED9}" type="datetimeFigureOut">
               <a:rPr kumimoji="1" lang="ja-JP" altLang="en-US" smtClean="0"/>
-              <a:t>2025/3/3</a:t>
+              <a:t>2026/5/13</a:t>
             </a:fld>
             <a:endParaRPr kumimoji="1" lang="ja-JP" altLang="en-US"/>
           </a:p>
@@ -2314,7 +2314,7 @@
           <a:p>
             <a:fld id="{E9CC885B-4903-4D54-9A93-00025F12DED9}" type="datetimeFigureOut">
               <a:rPr kumimoji="1" lang="ja-JP" altLang="en-US" smtClean="0"/>
-              <a:t>2025/3/3</a:t>
+              <a:t>2026/5/13</a:t>
             </a:fld>
             <a:endParaRPr kumimoji="1" lang="ja-JP" altLang="en-US"/>
           </a:p>
@@ -2657,7 +2657,7 @@
           <a:p>
             <a:fld id="{E9CC885B-4903-4D54-9A93-00025F12DED9}" type="datetimeFigureOut">
               <a:rPr kumimoji="1" lang="ja-JP" altLang="en-US" smtClean="0"/>
-              <a:t>2025/3/3</a:t>
+              <a:t>2026/5/13</a:t>
             </a:fld>
             <a:endParaRPr kumimoji="1" lang="ja-JP" altLang="en-US"/>
           </a:p>
@@ -2945,7 +2945,7 @@
           <a:p>
             <a:fld id="{E9CC885B-4903-4D54-9A93-00025F12DED9}" type="datetimeFigureOut">
               <a:rPr kumimoji="1" lang="ja-JP" altLang="en-US" smtClean="0"/>
-              <a:t>2025/3/3</a:t>
+              <a:t>2026/5/13</a:t>
             </a:fld>
             <a:endParaRPr kumimoji="1" lang="ja-JP" altLang="en-US"/>
           </a:p>
@@ -3218,7 +3218,7 @@
           <a:p>
             <a:fld id="{E9CC885B-4903-4D54-9A93-00025F12DED9}" type="datetimeFigureOut">
               <a:rPr kumimoji="1" lang="ja-JP" altLang="en-US" smtClean="0"/>
-              <a:t>2025/3/3</a:t>
+              <a:t>2026/5/13</a:t>
             </a:fld>
             <a:endParaRPr kumimoji="1" lang="ja-JP" altLang="en-US"/>
           </a:p>
@@ -7282,7 +7282,7 @@
           <a:p>
             <a:r>
               <a:rPr lang="ja-JP" altLang="en-US" sz="2400" dirty="0"/>
-              <a:t>これを見ると、ゲームの基本的なロジックに倣った関数があります。</a:t>
+              <a:t>これを見ると、ゲームの基本的なロジックに沿った関数があります。</a:t>
             </a:r>
             <a:endParaRPr lang="en-US" altLang="ja-JP" sz="2400" dirty="0"/>
           </a:p>

--- a/ゲーム科1年/00_前期/ゲームプログラミングⅡ/01_シーン管理.pptx
+++ b/ゲーム科1年/00_前期/ゲームプログラミングⅡ/01_シーン管理.pptx
@@ -280,7 +280,7 @@
           <a:p>
             <a:fld id="{E9CC885B-4903-4D54-9A93-00025F12DED9}" type="datetimeFigureOut">
               <a:rPr kumimoji="1" lang="ja-JP" altLang="en-US" smtClean="0"/>
-              <a:t>2026/5/13</a:t>
+              <a:t>2026/6/22</a:t>
             </a:fld>
             <a:endParaRPr kumimoji="1" lang="ja-JP" altLang="en-US"/>
           </a:p>
@@ -510,7 +510,7 @@
           <a:p>
             <a:fld id="{E9CC885B-4903-4D54-9A93-00025F12DED9}" type="datetimeFigureOut">
               <a:rPr kumimoji="1" lang="ja-JP" altLang="en-US" smtClean="0"/>
-              <a:t>2026/5/13</a:t>
+              <a:t>2026/6/22</a:t>
             </a:fld>
             <a:endParaRPr kumimoji="1" lang="ja-JP" altLang="en-US"/>
           </a:p>
@@ -750,7 +750,7 @@
           <a:p>
             <a:fld id="{E9CC885B-4903-4D54-9A93-00025F12DED9}" type="datetimeFigureOut">
               <a:rPr kumimoji="1" lang="ja-JP" altLang="en-US" smtClean="0"/>
-              <a:t>2026/5/13</a:t>
+              <a:t>2026/6/22</a:t>
             </a:fld>
             <a:endParaRPr kumimoji="1" lang="ja-JP" altLang="en-US"/>
           </a:p>
@@ -980,7 +980,7 @@
           <a:p>
             <a:fld id="{E9CC885B-4903-4D54-9A93-00025F12DED9}" type="datetimeFigureOut">
               <a:rPr kumimoji="1" lang="ja-JP" altLang="en-US" smtClean="0"/>
-              <a:t>2026/5/13</a:t>
+              <a:t>2026/6/22</a:t>
             </a:fld>
             <a:endParaRPr kumimoji="1" lang="ja-JP" altLang="en-US"/>
           </a:p>
@@ -1255,7 +1255,7 @@
           <a:p>
             <a:fld id="{E9CC885B-4903-4D54-9A93-00025F12DED9}" type="datetimeFigureOut">
               <a:rPr kumimoji="1" lang="ja-JP" altLang="en-US" smtClean="0"/>
-              <a:t>2026/5/13</a:t>
+              <a:t>2026/6/22</a:t>
             </a:fld>
             <a:endParaRPr kumimoji="1" lang="ja-JP" altLang="en-US"/>
           </a:p>
@@ -1584,7 +1584,7 @@
           <a:p>
             <a:fld id="{E9CC885B-4903-4D54-9A93-00025F12DED9}" type="datetimeFigureOut">
               <a:rPr kumimoji="1" lang="ja-JP" altLang="en-US" smtClean="0"/>
-              <a:t>2026/5/13</a:t>
+              <a:t>2026/6/22</a:t>
             </a:fld>
             <a:endParaRPr kumimoji="1" lang="ja-JP" altLang="en-US"/>
           </a:p>
@@ -2060,7 +2060,7 @@
           <a:p>
             <a:fld id="{E9CC885B-4903-4D54-9A93-00025F12DED9}" type="datetimeFigureOut">
               <a:rPr kumimoji="1" lang="ja-JP" altLang="en-US" smtClean="0"/>
-              <a:t>2026/5/13</a:t>
+              <a:t>2026/6/22</a:t>
             </a:fld>
             <a:endParaRPr kumimoji="1" lang="ja-JP" altLang="en-US"/>
           </a:p>
@@ -2201,7 +2201,7 @@
           <a:p>
             <a:fld id="{E9CC885B-4903-4D54-9A93-00025F12DED9}" type="datetimeFigureOut">
               <a:rPr kumimoji="1" lang="ja-JP" altLang="en-US" smtClean="0"/>
-              <a:t>2026/5/13</a:t>
+              <a:t>2026/6/22</a:t>
             </a:fld>
             <a:endParaRPr kumimoji="1" lang="ja-JP" altLang="en-US"/>
           </a:p>
@@ -2314,7 +2314,7 @@
           <a:p>
             <a:fld id="{E9CC885B-4903-4D54-9A93-00025F12DED9}" type="datetimeFigureOut">
               <a:rPr kumimoji="1" lang="ja-JP" altLang="en-US" smtClean="0"/>
-              <a:t>2026/5/13</a:t>
+              <a:t>2026/6/22</a:t>
             </a:fld>
             <a:endParaRPr kumimoji="1" lang="ja-JP" altLang="en-US"/>
           </a:p>
@@ -2657,7 +2657,7 @@
           <a:p>
             <a:fld id="{E9CC885B-4903-4D54-9A93-00025F12DED9}" type="datetimeFigureOut">
               <a:rPr kumimoji="1" lang="ja-JP" altLang="en-US" smtClean="0"/>
-              <a:t>2026/5/13</a:t>
+              <a:t>2026/6/22</a:t>
             </a:fld>
             <a:endParaRPr kumimoji="1" lang="ja-JP" altLang="en-US"/>
           </a:p>
@@ -2945,7 +2945,7 @@
           <a:p>
             <a:fld id="{E9CC885B-4903-4D54-9A93-00025F12DED9}" type="datetimeFigureOut">
               <a:rPr kumimoji="1" lang="ja-JP" altLang="en-US" smtClean="0"/>
-              <a:t>2026/5/13</a:t>
+              <a:t>2026/6/22</a:t>
             </a:fld>
             <a:endParaRPr kumimoji="1" lang="ja-JP" altLang="en-US"/>
           </a:p>
@@ -3218,7 +3218,7 @@
           <a:p>
             <a:fld id="{E9CC885B-4903-4D54-9A93-00025F12DED9}" type="datetimeFigureOut">
               <a:rPr kumimoji="1" lang="ja-JP" altLang="en-US" smtClean="0"/>
-              <a:t>2026/5/13</a:t>
+              <a:t>2026/6/22</a:t>
             </a:fld>
             <a:endParaRPr kumimoji="1" lang="ja-JP" altLang="en-US"/>
           </a:p>
@@ -4632,7 +4632,7 @@
         <p:spPr>
           <a:xfrm>
             <a:off x="576507" y="1216429"/>
-            <a:ext cx="9342622" cy="1200329"/>
+            <a:ext cx="9483686" cy="1200329"/>
           </a:xfrm>
           <a:prstGeom prst="rect">
             <a:avLst/>
@@ -4696,7 +4696,11 @@
           </a:p>
           <a:p>
             <a:r>
-              <a:rPr lang="en-US" altLang="ja-JP" sz="2400" dirty="0" err="1"/>
+              <a:rPr lang="en-US" altLang="ja-JP" sz="2400" b="1" dirty="0" err="1">
+                <a:solidFill>
+                  <a:srgbClr val="FF0000"/>
+                </a:solidFill>
+              </a:rPr>
               <a:t>SceneManager.h</a:t>
             </a:r>
             <a:r>
@@ -7102,7 +7106,7 @@
         <p:spPr>
           <a:xfrm>
             <a:off x="567542" y="1216429"/>
-            <a:ext cx="8488221" cy="461665"/>
+            <a:ext cx="8659743" cy="461665"/>
           </a:xfrm>
           <a:prstGeom prst="rect">
             <a:avLst/>
@@ -7116,20 +7120,40 @@
           <a:lstStyle/>
           <a:p>
             <a:r>
-              <a:rPr kumimoji="1" lang="en-US" altLang="ja-JP" sz="2400" dirty="0"/>
+              <a:rPr kumimoji="1" lang="en-US" altLang="ja-JP" sz="2400" b="1" dirty="0">
+                <a:solidFill>
+                  <a:srgbClr val="7030A0"/>
+                </a:solidFill>
+              </a:rPr>
               <a:t>Visual</a:t>
             </a:r>
             <a:r>
+              <a:rPr lang="ja-JP" altLang="en-US" sz="2400" b="1" dirty="0">
+                <a:solidFill>
+                  <a:srgbClr val="7030A0"/>
+                </a:solidFill>
+              </a:rPr>
+              <a:t> </a:t>
+            </a:r>
+            <a:r>
+              <a:rPr lang="en-US" altLang="ja-JP" sz="2400" b="1" dirty="0">
+                <a:solidFill>
+                  <a:srgbClr val="7030A0"/>
+                </a:solidFill>
+              </a:rPr>
+              <a:t>Studio</a:t>
+            </a:r>
+            <a:r>
+              <a:rPr lang="ja-JP" altLang="en-US" sz="2400" b="1" dirty="0">
+                <a:solidFill>
+                  <a:srgbClr val="7030A0"/>
+                </a:solidFill>
+              </a:rPr>
+              <a:t>側</a:t>
+            </a:r>
+            <a:r>
               <a:rPr lang="ja-JP" altLang="en-US" sz="2400" dirty="0"/>
-              <a:t> </a:t>
-            </a:r>
-            <a:r>
-              <a:rPr lang="en-US" altLang="ja-JP" sz="2400" dirty="0"/>
-              <a:t>Studio</a:t>
-            </a:r>
-            <a:r>
-              <a:rPr lang="ja-JP" altLang="en-US" sz="2400" dirty="0"/>
-              <a:t>側にも追加して、</a:t>
+              <a:t>にも追加して、</a:t>
             </a:r>
             <a:r>
               <a:rPr lang="en-US" altLang="ja-JP" sz="2400" b="1" dirty="0" err="1">
@@ -7658,7 +7682,7 @@
         <p:spPr>
           <a:xfrm>
             <a:off x="567542" y="1216429"/>
-            <a:ext cx="7879080" cy="1200329"/>
+            <a:ext cx="6955750" cy="830997"/>
           </a:xfrm>
           <a:prstGeom prst="rect">
             <a:avLst/>
@@ -7693,13 +7717,6 @@
             <a:r>
               <a:rPr lang="ja-JP" altLang="en-US" sz="2400" dirty="0"/>
               <a:t>が必要です。</a:t>
-            </a:r>
-            <a:endParaRPr lang="en-US" altLang="ja-JP" sz="2400" dirty="0"/>
-          </a:p>
-          <a:p>
-            <a:r>
-              <a:rPr lang="ja-JP" altLang="en-US" sz="2400" dirty="0"/>
-              <a:t>こちらは大事な部分なので一緒に作っていきましょう。</a:t>
             </a:r>
             <a:endParaRPr lang="en-US" altLang="ja-JP" sz="2400" dirty="0"/>
           </a:p>
